--- a/duck/ransomware_image.pptx
+++ b/duck/ransomware_image.pptx
@@ -6,6 +6,7 @@
   </p:sldMasterIdLst>
   <p:sldIdLst>
     <p:sldId id="256" r:id="rId2"/>
+    <p:sldId id="257" r:id="rId3"/>
   </p:sldIdLst>
   <p:sldSz cx="18288000" cy="10287000"/>
   <p:notesSz cx="6858000" cy="9144000"/>
@@ -104,6 +105,11 @@
       </a:defRPr>
     </a:lvl9pPr>
   </p:defaultTextStyle>
+  <p:extLst>
+    <p:ext uri="{EFAFB233-063F-42B5-8137-9DF3F51BA10A}">
+      <p15:sldGuideLst xmlns:p15="http://schemas.microsoft.com/office/powerpoint/2012/main"/>
+    </p:ext>
+  </p:extLst>
 </p:presentation>
 </file>
 
@@ -3222,6 +3228,379 @@
 </p:sld>
 </file>
 
+<file path=ppt/slides/slide2.xml><?xml version="1.0" encoding="utf-8"?>
+<p:sld xmlns:a="http://schemas.openxmlformats.org/drawingml/2006/main" xmlns:r="http://schemas.openxmlformats.org/officeDocument/2006/relationships" xmlns:p="http://schemas.openxmlformats.org/presentationml/2006/main">
+  <p:cSld>
+    <p:bg>
+      <p:bgPr>
+        <a:solidFill>
+          <a:srgbClr val="005BB2"/>
+        </a:solidFill>
+        <a:effectLst/>
+      </p:bgPr>
+    </p:bg>
+    <p:spTree>
+      <p:nvGrpSpPr>
+        <p:cNvPr id="1" name="">
+          <a:extLst>
+            <a:ext uri="{FF2B5EF4-FFF2-40B4-BE49-F238E27FC236}">
+              <a16:creationId xmlns:a16="http://schemas.microsoft.com/office/drawing/2014/main" id="{20325612-3E34-2F7A-3BA5-2E66BF078C41}"/>
+            </a:ext>
+          </a:extLst>
+        </p:cNvPr>
+        <p:cNvGrpSpPr/>
+        <p:nvPr/>
+      </p:nvGrpSpPr>
+      <p:grpSpPr>
+        <a:xfrm>
+          <a:off x="0" y="0"/>
+          <a:ext cx="0" cy="0"/>
+          <a:chOff x="0" y="0"/>
+          <a:chExt cx="0" cy="0"/>
+        </a:xfrm>
+      </p:grpSpPr>
+      <p:sp>
+        <p:nvSpPr>
+          <p:cNvPr id="2" name="TextBox 3">
+            <a:extLst>
+              <a:ext uri="{FF2B5EF4-FFF2-40B4-BE49-F238E27FC236}">
+                <a16:creationId xmlns:a16="http://schemas.microsoft.com/office/drawing/2014/main" id="{6976DD39-843E-26F6-6285-7AC07F8D7A0B}"/>
+              </a:ext>
+            </a:extLst>
+          </p:cNvPr>
+          <p:cNvSpPr txBox="1"/>
+          <p:nvPr/>
+        </p:nvSpPr>
+        <p:spPr>
+          <a:xfrm>
+            <a:off x="0" y="4843856"/>
+            <a:ext cx="18287999" cy="1938992"/>
+          </a:xfrm>
+          <a:prstGeom prst="rect">
+            <a:avLst/>
+          </a:prstGeom>
+          <a:noFill/>
+        </p:spPr>
+        <p:txBody>
+          <a:bodyPr wrap="square" rtlCol="0">
+            <a:spAutoFit/>
+          </a:bodyPr>
+          <a:lstStyle>
+            <a:defPPr>
+              <a:defRPr lang="en-US"/>
+            </a:defPPr>
+            <a:lvl1pPr marL="0" algn="l" defTabSz="457200" rtl="0" eaLnBrk="1" latinLnBrk="0" hangingPunct="1">
+              <a:defRPr sz="1800" kern="1200">
+                <a:solidFill>
+                  <a:schemeClr val="tx1"/>
+                </a:solidFill>
+                <a:latin typeface="+mn-lt"/>
+                <a:ea typeface="+mn-ea"/>
+                <a:cs typeface="+mn-cs"/>
+              </a:defRPr>
+            </a:lvl1pPr>
+            <a:lvl2pPr marL="457200" algn="l" defTabSz="457200" rtl="0" eaLnBrk="1" latinLnBrk="0" hangingPunct="1">
+              <a:defRPr sz="1800" kern="1200">
+                <a:solidFill>
+                  <a:schemeClr val="tx1"/>
+                </a:solidFill>
+                <a:latin typeface="+mn-lt"/>
+                <a:ea typeface="+mn-ea"/>
+                <a:cs typeface="+mn-cs"/>
+              </a:defRPr>
+            </a:lvl2pPr>
+            <a:lvl3pPr marL="914400" algn="l" defTabSz="457200" rtl="0" eaLnBrk="1" latinLnBrk="0" hangingPunct="1">
+              <a:defRPr sz="1800" kern="1200">
+                <a:solidFill>
+                  <a:schemeClr val="tx1"/>
+                </a:solidFill>
+                <a:latin typeface="+mn-lt"/>
+                <a:ea typeface="+mn-ea"/>
+                <a:cs typeface="+mn-cs"/>
+              </a:defRPr>
+            </a:lvl3pPr>
+            <a:lvl4pPr marL="1371600" algn="l" defTabSz="457200" rtl="0" eaLnBrk="1" latinLnBrk="0" hangingPunct="1">
+              <a:defRPr sz="1800" kern="1200">
+                <a:solidFill>
+                  <a:schemeClr val="tx1"/>
+                </a:solidFill>
+                <a:latin typeface="+mn-lt"/>
+                <a:ea typeface="+mn-ea"/>
+                <a:cs typeface="+mn-cs"/>
+              </a:defRPr>
+            </a:lvl4pPr>
+            <a:lvl5pPr marL="1828800" algn="l" defTabSz="457200" rtl="0" eaLnBrk="1" latinLnBrk="0" hangingPunct="1">
+              <a:defRPr sz="1800" kern="1200">
+                <a:solidFill>
+                  <a:schemeClr val="tx1"/>
+                </a:solidFill>
+                <a:latin typeface="+mn-lt"/>
+                <a:ea typeface="+mn-ea"/>
+                <a:cs typeface="+mn-cs"/>
+              </a:defRPr>
+            </a:lvl5pPr>
+            <a:lvl6pPr marL="2286000" algn="l" defTabSz="457200" rtl="0" eaLnBrk="1" latinLnBrk="0" hangingPunct="1">
+              <a:defRPr sz="1800" kern="1200">
+                <a:solidFill>
+                  <a:schemeClr val="tx1"/>
+                </a:solidFill>
+                <a:latin typeface="+mn-lt"/>
+                <a:ea typeface="+mn-ea"/>
+                <a:cs typeface="+mn-cs"/>
+              </a:defRPr>
+            </a:lvl6pPr>
+            <a:lvl7pPr marL="2743200" algn="l" defTabSz="457200" rtl="0" eaLnBrk="1" latinLnBrk="0" hangingPunct="1">
+              <a:defRPr sz="1800" kern="1200">
+                <a:solidFill>
+                  <a:schemeClr val="tx1"/>
+                </a:solidFill>
+                <a:latin typeface="+mn-lt"/>
+                <a:ea typeface="+mn-ea"/>
+                <a:cs typeface="+mn-cs"/>
+              </a:defRPr>
+            </a:lvl7pPr>
+            <a:lvl8pPr marL="3200400" algn="l" defTabSz="457200" rtl="0" eaLnBrk="1" latinLnBrk="0" hangingPunct="1">
+              <a:defRPr sz="1800" kern="1200">
+                <a:solidFill>
+                  <a:schemeClr val="tx1"/>
+                </a:solidFill>
+                <a:latin typeface="+mn-lt"/>
+                <a:ea typeface="+mn-ea"/>
+                <a:cs typeface="+mn-cs"/>
+              </a:defRPr>
+            </a:lvl8pPr>
+            <a:lvl9pPr marL="3657600" algn="l" defTabSz="457200" rtl="0" eaLnBrk="1" latinLnBrk="0" hangingPunct="1">
+              <a:defRPr sz="1800" kern="1200">
+                <a:solidFill>
+                  <a:schemeClr val="tx1"/>
+                </a:solidFill>
+                <a:latin typeface="+mn-lt"/>
+                <a:ea typeface="+mn-ea"/>
+                <a:cs typeface="+mn-cs"/>
+              </a:defRPr>
+            </a:lvl9pPr>
+          </a:lstStyle>
+          <a:p>
+            <a:pPr algn="ctr"/>
+            <a:r>
+              <a:rPr lang="en-US" sz="6000" dirty="0">
+                <a:solidFill>
+                  <a:srgbClr val="FAFBFF"/>
+                </a:solidFill>
+                <a:latin typeface="Segoe UI" panose="020B0502040204020203" pitchFamily="34" charset="0"/>
+                <a:cs typeface="Segoe UI" panose="020B0502040204020203" pitchFamily="34" charset="0"/>
+              </a:rPr>
+              <a:t>Working on updates</a:t>
+            </a:r>
+          </a:p>
+          <a:p>
+            <a:pPr algn="ctr"/>
+            <a:r>
+              <a:rPr lang="en-US" sz="6000" dirty="0">
+                <a:solidFill>
+                  <a:srgbClr val="FAFBFF"/>
+                </a:solidFill>
+                <a:latin typeface="Segoe UI" panose="020B0502040204020203" pitchFamily="34" charset="0"/>
+                <a:cs typeface="Segoe UI" panose="020B0502040204020203" pitchFamily="34" charset="0"/>
+              </a:rPr>
+              <a:t>95% complete</a:t>
+            </a:r>
+            <a:endParaRPr lang="en-BS" sz="6000" dirty="0">
+              <a:solidFill>
+                <a:srgbClr val="FAFBFF"/>
+              </a:solidFill>
+              <a:latin typeface="Segoe UI" panose="020B0502040204020203" pitchFamily="34" charset="0"/>
+              <a:cs typeface="Segoe UI" panose="020B0502040204020203" pitchFamily="34" charset="0"/>
+            </a:endParaRPr>
+          </a:p>
+        </p:txBody>
+      </p:sp>
+      <p:sp>
+        <p:nvSpPr>
+          <p:cNvPr id="3" name="TextBox 4">
+            <a:extLst>
+              <a:ext uri="{FF2B5EF4-FFF2-40B4-BE49-F238E27FC236}">
+                <a16:creationId xmlns:a16="http://schemas.microsoft.com/office/drawing/2014/main" id="{ADBBFCCC-ACF3-137A-6438-4BE690544B75}"/>
+              </a:ext>
+            </a:extLst>
+          </p:cNvPr>
+          <p:cNvSpPr txBox="1"/>
+          <p:nvPr/>
+        </p:nvSpPr>
+        <p:spPr>
+          <a:xfrm>
+            <a:off x="1" y="7208516"/>
+            <a:ext cx="18287999" cy="584775"/>
+          </a:xfrm>
+          <a:prstGeom prst="rect">
+            <a:avLst/>
+          </a:prstGeom>
+          <a:noFill/>
+        </p:spPr>
+        <p:txBody>
+          <a:bodyPr wrap="square" rtlCol="0">
+            <a:spAutoFit/>
+          </a:bodyPr>
+          <a:lstStyle>
+            <a:defPPr>
+              <a:defRPr lang="en-US"/>
+            </a:defPPr>
+            <a:lvl1pPr marL="0" algn="l" defTabSz="457200" rtl="0" eaLnBrk="1" latinLnBrk="0" hangingPunct="1">
+              <a:defRPr sz="1800" kern="1200">
+                <a:solidFill>
+                  <a:schemeClr val="tx1"/>
+                </a:solidFill>
+                <a:latin typeface="+mn-lt"/>
+                <a:ea typeface="+mn-ea"/>
+                <a:cs typeface="+mn-cs"/>
+              </a:defRPr>
+            </a:lvl1pPr>
+            <a:lvl2pPr marL="457200" algn="l" defTabSz="457200" rtl="0" eaLnBrk="1" latinLnBrk="0" hangingPunct="1">
+              <a:defRPr sz="1800" kern="1200">
+                <a:solidFill>
+                  <a:schemeClr val="tx1"/>
+                </a:solidFill>
+                <a:latin typeface="+mn-lt"/>
+                <a:ea typeface="+mn-ea"/>
+                <a:cs typeface="+mn-cs"/>
+              </a:defRPr>
+            </a:lvl2pPr>
+            <a:lvl3pPr marL="914400" algn="l" defTabSz="457200" rtl="0" eaLnBrk="1" latinLnBrk="0" hangingPunct="1">
+              <a:defRPr sz="1800" kern="1200">
+                <a:solidFill>
+                  <a:schemeClr val="tx1"/>
+                </a:solidFill>
+                <a:latin typeface="+mn-lt"/>
+                <a:ea typeface="+mn-ea"/>
+                <a:cs typeface="+mn-cs"/>
+              </a:defRPr>
+            </a:lvl3pPr>
+            <a:lvl4pPr marL="1371600" algn="l" defTabSz="457200" rtl="0" eaLnBrk="1" latinLnBrk="0" hangingPunct="1">
+              <a:defRPr sz="1800" kern="1200">
+                <a:solidFill>
+                  <a:schemeClr val="tx1"/>
+                </a:solidFill>
+                <a:latin typeface="+mn-lt"/>
+                <a:ea typeface="+mn-ea"/>
+                <a:cs typeface="+mn-cs"/>
+              </a:defRPr>
+            </a:lvl4pPr>
+            <a:lvl5pPr marL="1828800" algn="l" defTabSz="457200" rtl="0" eaLnBrk="1" latinLnBrk="0" hangingPunct="1">
+              <a:defRPr sz="1800" kern="1200">
+                <a:solidFill>
+                  <a:schemeClr val="tx1"/>
+                </a:solidFill>
+                <a:latin typeface="+mn-lt"/>
+                <a:ea typeface="+mn-ea"/>
+                <a:cs typeface="+mn-cs"/>
+              </a:defRPr>
+            </a:lvl5pPr>
+            <a:lvl6pPr marL="2286000" algn="l" defTabSz="457200" rtl="0" eaLnBrk="1" latinLnBrk="0" hangingPunct="1">
+              <a:defRPr sz="1800" kern="1200">
+                <a:solidFill>
+                  <a:schemeClr val="tx1"/>
+                </a:solidFill>
+                <a:latin typeface="+mn-lt"/>
+                <a:ea typeface="+mn-ea"/>
+                <a:cs typeface="+mn-cs"/>
+              </a:defRPr>
+            </a:lvl6pPr>
+            <a:lvl7pPr marL="2743200" algn="l" defTabSz="457200" rtl="0" eaLnBrk="1" latinLnBrk="0" hangingPunct="1">
+              <a:defRPr sz="1800" kern="1200">
+                <a:solidFill>
+                  <a:schemeClr val="tx1"/>
+                </a:solidFill>
+                <a:latin typeface="+mn-lt"/>
+                <a:ea typeface="+mn-ea"/>
+                <a:cs typeface="+mn-cs"/>
+              </a:defRPr>
+            </a:lvl7pPr>
+            <a:lvl8pPr marL="3200400" algn="l" defTabSz="457200" rtl="0" eaLnBrk="1" latinLnBrk="0" hangingPunct="1">
+              <a:defRPr sz="1800" kern="1200">
+                <a:solidFill>
+                  <a:schemeClr val="tx1"/>
+                </a:solidFill>
+                <a:latin typeface="+mn-lt"/>
+                <a:ea typeface="+mn-ea"/>
+                <a:cs typeface="+mn-cs"/>
+              </a:defRPr>
+            </a:lvl8pPr>
+            <a:lvl9pPr marL="3657600" algn="l" defTabSz="457200" rtl="0" eaLnBrk="1" latinLnBrk="0" hangingPunct="1">
+              <a:defRPr sz="1800" kern="1200">
+                <a:solidFill>
+                  <a:schemeClr val="tx1"/>
+                </a:solidFill>
+                <a:latin typeface="+mn-lt"/>
+                <a:ea typeface="+mn-ea"/>
+                <a:cs typeface="+mn-cs"/>
+              </a:defRPr>
+            </a:lvl9pPr>
+          </a:lstStyle>
+          <a:p>
+            <a:pPr algn="ctr"/>
+            <a:r>
+              <a:rPr lang="en-US" sz="3200" dirty="0">
+                <a:solidFill>
+                  <a:srgbClr val="FAFBFF"/>
+                </a:solidFill>
+                <a:latin typeface="Segoe UI" panose="020B0502040204020203" pitchFamily="34" charset="0"/>
+                <a:cs typeface="Segoe UI" panose="020B0502040204020203" pitchFamily="34" charset="0"/>
+              </a:rPr>
+              <a:t>Don’t turn off your computer</a:t>
+            </a:r>
+            <a:endParaRPr lang="en-BS" sz="3200" dirty="0">
+              <a:solidFill>
+                <a:srgbClr val="FAFBFF"/>
+              </a:solidFill>
+              <a:latin typeface="Segoe UI" panose="020B0502040204020203" pitchFamily="34" charset="0"/>
+              <a:cs typeface="Segoe UI" panose="020B0502040204020203" pitchFamily="34" charset="0"/>
+            </a:endParaRPr>
+          </a:p>
+        </p:txBody>
+      </p:sp>
+      <p:pic>
+        <p:nvPicPr>
+          <p:cNvPr id="6" name="Picture 5">
+            <a:extLst>
+              <a:ext uri="{FF2B5EF4-FFF2-40B4-BE49-F238E27FC236}">
+                <a16:creationId xmlns:a16="http://schemas.microsoft.com/office/drawing/2014/main" id="{07247D86-6C3B-1837-6853-9293B6E19E71}"/>
+              </a:ext>
+            </a:extLst>
+          </p:cNvPr>
+          <p:cNvPicPr>
+            <a:picLocks noChangeAspect="1"/>
+          </p:cNvPicPr>
+          <p:nvPr/>
+        </p:nvPicPr>
+        <p:blipFill>
+          <a:blip r:embed="rId2"/>
+          <a:stretch>
+            <a:fillRect/>
+          </a:stretch>
+        </p:blipFill>
+        <p:spPr>
+          <a:xfrm>
+            <a:off x="7731882" y="2493708"/>
+            <a:ext cx="2824237" cy="1924480"/>
+          </a:xfrm>
+          <a:prstGeom prst="rect">
+            <a:avLst/>
+          </a:prstGeom>
+        </p:spPr>
+      </p:pic>
+    </p:spTree>
+    <p:extLst>
+      <p:ext uri="{BB962C8B-B14F-4D97-AF65-F5344CB8AC3E}">
+        <p14:creationId xmlns:p14="http://schemas.microsoft.com/office/powerpoint/2010/main" val="2840008940"/>
+      </p:ext>
+    </p:extLst>
+  </p:cSld>
+  <p:clrMapOvr>
+    <a:masterClrMapping/>
+  </p:clrMapOvr>
+</p:sld>
+</file>
+
 <file path=ppt/theme/theme1.xml><?xml version="1.0" encoding="utf-8"?>
 <a:theme xmlns:a="http://schemas.openxmlformats.org/drawingml/2006/main" name="Office Theme">
   <a:themeElements>
